--- a/Week11-A2/presentation.pptx
+++ b/Week11-A2/presentation.pptx
@@ -5,7 +5,7 @@
     <p:sldMasterId id="2147483648" r:id="rId1"/>
   </p:sldMasterIdLst>
   <p:notesMasterIdLst>
-    <p:notesMasterId r:id="rId11"/>
+    <p:notesMasterId r:id="rId10"/>
   </p:notesMasterIdLst>
   <p:sldIdLst>
     <p:sldId id="256" r:id="rId2"/>
@@ -13,10 +13,9 @@
     <p:sldId id="258" r:id="rId4"/>
     <p:sldId id="259" r:id="rId5"/>
     <p:sldId id="260" r:id="rId6"/>
-    <p:sldId id="261" r:id="rId7"/>
-    <p:sldId id="262" r:id="rId8"/>
-    <p:sldId id="263" r:id="rId9"/>
-    <p:sldId id="264" r:id="rId10"/>
+    <p:sldId id="262" r:id="rId7"/>
+    <p:sldId id="263" r:id="rId8"/>
+    <p:sldId id="264" r:id="rId9"/>
   </p:sldIdLst>
   <p:sldSz cx="9144000" cy="5143500" type="screen16x9"/>
   <p:notesSz cx="5143500" cy="9144000"/>
@@ -917,90 +916,6 @@
 </p:notes>
 </file>
 
-<file path=ppt/notesSlides/notesSlide9.xml><?xml version="1.0" encoding="utf-8"?>
-<p:notes xmlns:a="http://schemas.openxmlformats.org/drawingml/2006/main" xmlns:r="http://schemas.openxmlformats.org/officeDocument/2006/relationships" xmlns:p="http://schemas.openxmlformats.org/presentationml/2006/main">
-  <p:cSld>
-    <p:spTree>
-      <p:nvGrpSpPr>
-        <p:cNvPr id="1" name=""/>
-        <p:cNvGrpSpPr/>
-        <p:nvPr/>
-      </p:nvGrpSpPr>
-      <p:grpSpPr>
-        <a:xfrm>
-          <a:off x="0" y="0"/>
-          <a:ext cx="0" cy="0"/>
-          <a:chOff x="0" y="0"/>
-          <a:chExt cx="0" cy="0"/>
-        </a:xfrm>
-      </p:grpSpPr>
-      <p:sp>
-        <p:nvSpPr>
-          <p:cNvPr id="2" name="Slide Image Placeholder 1"/>
-          <p:cNvSpPr>
-            <a:spLocks noGrp="1" noRot="1" noChangeAspect="1"/>
-          </p:cNvSpPr>
-          <p:nvPr>
-            <p:ph type="sldImg"/>
-          </p:nvPr>
-        </p:nvSpPr>
-        <p:spPr/>
-      </p:sp>
-      <p:sp>
-        <p:nvSpPr>
-          <p:cNvPr id="3" name="Notes Placeholder 2"/>
-          <p:cNvSpPr>
-            <a:spLocks noGrp="1"/>
-          </p:cNvSpPr>
-          <p:nvPr>
-            <p:ph type="body" idx="1"/>
-          </p:nvPr>
-        </p:nvSpPr>
-        <p:spPr/>
-        <p:txBody>
-          <a:bodyPr/>
-          <a:lstStyle/>
-          <a:p>
-            <a:endParaRPr lang="en-US" dirty="0"/>
-          </a:p>
-        </p:txBody>
-      </p:sp>
-      <p:sp>
-        <p:nvSpPr>
-          <p:cNvPr id="4" name="Slide Number Placeholder 3"/>
-          <p:cNvSpPr>
-            <a:spLocks noGrp="1"/>
-          </p:cNvSpPr>
-          <p:nvPr>
-            <p:ph type="sldNum" sz="quarter" idx="10"/>
-          </p:nvPr>
-        </p:nvSpPr>
-        <p:spPr/>
-        <p:txBody>
-          <a:bodyPr/>
-          <a:lstStyle/>
-          <a:p>
-            <a:fld id="{F7021451-1387-4CA6-816F-3879F97B5CBC}" type="slidenum">
-              <a:rPr lang="en-US"/>
-              <a:t>9</a:t>
-            </a:fld>
-            <a:endParaRPr lang="en-US"/>
-          </a:p>
-        </p:txBody>
-      </p:sp>
-    </p:spTree>
-    <p:extLst>
-      <p:ext uri="{BB962C8B-B14F-4D97-AF65-F5344CB8AC3E}">
-        <p14:creationId xmlns:p14="http://schemas.microsoft.com/office/powerpoint/2010/main" val="1024086991"/>
-      </p:ext>
-    </p:extLst>
-  </p:cSld>
-  <p:clrMapOvr>
-    <a:masterClrMapping/>
-  </p:clrMapOvr>
-</p:notes>
-</file>
-
 <file path=ppt/slideLayouts/slideLayout1.xml><?xml version="1.0" encoding="utf-8"?>
 <p:sldLayout xmlns:a="http://schemas.openxmlformats.org/drawingml/2006/main" xmlns:r="http://schemas.openxmlformats.org/officeDocument/2006/relationships" xmlns:p="http://schemas.openxmlformats.org/presentationml/2006/main" preserve="1">
   <p:cSld name="DEFAULT">
@@ -4393,1411 +4308,6 @@
 
 <file path=ppt/slides/slide6.xml><?xml version="1.0" encoding="utf-8"?>
 <p:sld xmlns:a="http://schemas.openxmlformats.org/drawingml/2006/main" xmlns:r="http://schemas.openxmlformats.org/officeDocument/2006/relationships" xmlns:p="http://schemas.openxmlformats.org/presentationml/2006/main">
-  <p:cSld name="Slide 6">
-    <p:bg>
-      <p:bgPr>
-        <a:solidFill>
-          <a:srgbClr val="F3F4F6"/>
-        </a:solidFill>
-        <a:effectLst/>
-      </p:bgPr>
-    </p:bg>
-    <p:spTree>
-      <p:nvGrpSpPr>
-        <p:cNvPr id="1" name=""/>
-        <p:cNvGrpSpPr/>
-        <p:nvPr/>
-      </p:nvGrpSpPr>
-      <p:grpSpPr>
-        <a:xfrm>
-          <a:off x="0" y="0"/>
-          <a:ext cx="0" cy="0"/>
-          <a:chOff x="0" y="0"/>
-          <a:chExt cx="0" cy="0"/>
-        </a:xfrm>
-      </p:grpSpPr>
-      <p:sp>
-        <p:nvSpPr>
-          <p:cNvPr id="2" name="Shape 0"/>
-          <p:cNvSpPr/>
-          <p:nvPr/>
-        </p:nvSpPr>
-        <p:spPr>
-          <a:xfrm>
-            <a:off x="0" y="0"/>
-            <a:ext cx="9144000" cy="685800"/>
-          </a:xfrm>
-          <a:prstGeom prst="rect">
-            <a:avLst/>
-          </a:prstGeom>
-          <a:solidFill>
-            <a:srgbClr val="1B2B5E"/>
-          </a:solidFill>
-          <a:ln w="12700">
-            <a:solidFill>
-              <a:srgbClr val="1B2B5E"/>
-            </a:solidFill>
-            <a:prstDash val="solid"/>
-          </a:ln>
-        </p:spPr>
-        <p:txBody>
-          <a:bodyPr/>
-          <a:lstStyle/>
-          <a:p>
-            <a:endParaRPr lang="en-CA"/>
-          </a:p>
-        </p:txBody>
-      </p:sp>
-      <p:sp>
-        <p:nvSpPr>
-          <p:cNvPr id="3" name="Text 1"/>
-          <p:cNvSpPr/>
-          <p:nvPr/>
-        </p:nvSpPr>
-        <p:spPr>
-          <a:xfrm>
-            <a:off x="365760" y="0"/>
-            <a:ext cx="8412480" cy="685800"/>
-          </a:xfrm>
-          <a:prstGeom prst="rect">
-            <a:avLst/>
-          </a:prstGeom>
-          <a:noFill/>
-          <a:ln/>
-        </p:spPr>
-        <p:txBody>
-          <a:bodyPr wrap="square" rtlCol="0" anchor="ctr"/>
-          <a:lstStyle/>
-          <a:p>
-            <a:pPr marL="0" indent="0">
-              <a:buNone/>
-            </a:pPr>
-            <a:r>
-              <a:rPr lang="en-US" sz="2600" b="1" dirty="0">
-                <a:solidFill>
-                  <a:srgbClr val="FFFFFF"/>
-                </a:solidFill>
-                <a:latin typeface="Cambria" pitchFamily="34" charset="0"/>
-                <a:ea typeface="Cambria" pitchFamily="34" charset="-122"/>
-                <a:cs typeface="Cambria" pitchFamily="34" charset="-120"/>
-              </a:rPr>
-              <a:t>Forecasting Models</a:t>
-            </a:r>
-            <a:endParaRPr lang="en-US" sz="2600" dirty="0"/>
-          </a:p>
-        </p:txBody>
-      </p:sp>
-      <p:graphicFrame>
-        <p:nvGraphicFramePr>
-          <p:cNvPr id="7" name="Table 0"/>
-          <p:cNvGraphicFramePr>
-            <a:graphicFrameLocks noGrp="1"/>
-          </p:cNvGraphicFramePr>
-          <p:nvPr>
-            <p:extLst>
-              <p:ext uri="{D42A27DB-BD31-4B8C-83A1-F6EECF244321}">
-                <p14:modId xmlns:p14="http://schemas.microsoft.com/office/powerpoint/2010/main" val="1579011935"/>
-              </p:ext>
-            </p:extLst>
-          </p:nvPr>
-        </p:nvGraphicFramePr>
-        <p:xfrm>
-          <a:off x="365760" y="841248"/>
-          <a:ext cx="8412480" cy="2633472"/>
-        </p:xfrm>
-        <a:graphic>
-          <a:graphicData uri="http://schemas.openxmlformats.org/drawingml/2006/table">
-            <a:tbl>
-              <a:tblPr/>
-              <a:tblGrid>
-                <a:gridCol w="1828800">
-                  <a:extLst>
-                    <a:ext uri="{9D8B030D-6E8A-4147-A177-3AD203B41FA5}">
-                      <a16:colId xmlns:a16="http://schemas.microsoft.com/office/drawing/2014/main" val="20000"/>
-                    </a:ext>
-                  </a:extLst>
-                </a:gridCol>
-                <a:gridCol w="2011680">
-                  <a:extLst>
-                    <a:ext uri="{9D8B030D-6E8A-4147-A177-3AD203B41FA5}">
-                      <a16:colId xmlns:a16="http://schemas.microsoft.com/office/drawing/2014/main" val="20001"/>
-                    </a:ext>
-                  </a:extLst>
-                </a:gridCol>
-                <a:gridCol w="4572000">
-                  <a:extLst>
-                    <a:ext uri="{9D8B030D-6E8A-4147-A177-3AD203B41FA5}">
-                      <a16:colId xmlns:a16="http://schemas.microsoft.com/office/drawing/2014/main" val="20002"/>
-                    </a:ext>
-                  </a:extLst>
-                </a:gridCol>
-              </a:tblGrid>
-              <a:tr h="438912">
-                <a:tc>
-                  <a:txBody>
-                    <a:bodyPr/>
-                    <a:lstStyle/>
-                    <a:p>
-                      <a:pPr marL="0" indent="0">
-                        <a:buNone/>
-                      </a:pPr>
-                      <a:r>
-                        <a:rPr lang="en-US" sz="1400" b="1" dirty="0">
-                          <a:solidFill>
-                            <a:srgbClr val="FFFFFF"/>
-                          </a:solidFill>
-                        </a:rPr>
-                        <a:t>Model</a:t>
-                      </a:r>
-                      <a:endParaRPr lang="en-US" sz="1400" dirty="0"/>
-                    </a:p>
-                  </a:txBody>
-                  <a:tcPr>
-                    <a:lnL w="6350" cap="flat" cmpd="sng" algn="ctr">
-                      <a:solidFill>
-                        <a:srgbClr val="E5E7EB"/>
-                      </a:solidFill>
-                      <a:prstDash val="solid"/>
-                      <a:round/>
-                      <a:headEnd type="none" w="med" len="med"/>
-                      <a:tailEnd type="none" w="med" len="med"/>
-                    </a:lnL>
-                    <a:lnR w="6350" cap="flat" cmpd="sng" algn="ctr">
-                      <a:solidFill>
-                        <a:srgbClr val="E5E7EB"/>
-                      </a:solidFill>
-                      <a:prstDash val="solid"/>
-                      <a:round/>
-                      <a:headEnd type="none" w="med" len="med"/>
-                      <a:tailEnd type="none" w="med" len="med"/>
-                    </a:lnR>
-                    <a:lnT w="6350" cap="flat" cmpd="sng" algn="ctr">
-                      <a:solidFill>
-                        <a:srgbClr val="E5E7EB"/>
-                      </a:solidFill>
-                      <a:prstDash val="solid"/>
-                      <a:round/>
-                      <a:headEnd type="none" w="med" len="med"/>
-                      <a:tailEnd type="none" w="med" len="med"/>
-                    </a:lnT>
-                    <a:lnB w="6350" cap="flat" cmpd="sng" algn="ctr">
-                      <a:solidFill>
-                        <a:srgbClr val="E5E7EB"/>
-                      </a:solidFill>
-                      <a:prstDash val="solid"/>
-                      <a:round/>
-                      <a:headEnd type="none" w="med" len="med"/>
-                      <a:tailEnd type="none" w="med" len="med"/>
-                    </a:lnB>
-                    <a:solidFill>
-                      <a:srgbClr val="1B2B5E"/>
-                    </a:solidFill>
-                  </a:tcPr>
-                </a:tc>
-                <a:tc>
-                  <a:txBody>
-                    <a:bodyPr/>
-                    <a:lstStyle/>
-                    <a:p>
-                      <a:pPr marL="0" indent="0">
-                        <a:buNone/>
-                      </a:pPr>
-                      <a:r>
-                        <a:rPr lang="en-US" sz="1400" b="1" dirty="0">
-                          <a:solidFill>
-                            <a:srgbClr val="FFFFFF"/>
-                          </a:solidFill>
-                        </a:rPr>
-                        <a:t>Type</a:t>
-                      </a:r>
-                      <a:endParaRPr lang="en-US" sz="1400" dirty="0"/>
-                    </a:p>
-                  </a:txBody>
-                  <a:tcPr>
-                    <a:lnL w="6350" cap="flat" cmpd="sng" algn="ctr">
-                      <a:solidFill>
-                        <a:srgbClr val="E5E7EB"/>
-                      </a:solidFill>
-                      <a:prstDash val="solid"/>
-                      <a:round/>
-                      <a:headEnd type="none" w="med" len="med"/>
-                      <a:tailEnd type="none" w="med" len="med"/>
-                    </a:lnL>
-                    <a:lnR w="6350" cap="flat" cmpd="sng" algn="ctr">
-                      <a:solidFill>
-                        <a:srgbClr val="E5E7EB"/>
-                      </a:solidFill>
-                      <a:prstDash val="solid"/>
-                      <a:round/>
-                      <a:headEnd type="none" w="med" len="med"/>
-                      <a:tailEnd type="none" w="med" len="med"/>
-                    </a:lnR>
-                    <a:lnT w="6350" cap="flat" cmpd="sng" algn="ctr">
-                      <a:solidFill>
-                        <a:srgbClr val="E5E7EB"/>
-                      </a:solidFill>
-                      <a:prstDash val="solid"/>
-                      <a:round/>
-                      <a:headEnd type="none" w="med" len="med"/>
-                      <a:tailEnd type="none" w="med" len="med"/>
-                    </a:lnT>
-                    <a:lnB w="6350" cap="flat" cmpd="sng" algn="ctr">
-                      <a:solidFill>
-                        <a:srgbClr val="E5E7EB"/>
-                      </a:solidFill>
-                      <a:prstDash val="solid"/>
-                      <a:round/>
-                      <a:headEnd type="none" w="med" len="med"/>
-                      <a:tailEnd type="none" w="med" len="med"/>
-                    </a:lnB>
-                    <a:solidFill>
-                      <a:srgbClr val="1B2B5E"/>
-                    </a:solidFill>
-                  </a:tcPr>
-                </a:tc>
-                <a:tc>
-                  <a:txBody>
-                    <a:bodyPr/>
-                    <a:lstStyle/>
-                    <a:p>
-                      <a:pPr marL="0" indent="0">
-                        <a:buNone/>
-                      </a:pPr>
-                      <a:r>
-                        <a:rPr lang="en-US" sz="1400" b="1" dirty="0">
-                          <a:solidFill>
-                            <a:srgbClr val="FFFFFF"/>
-                          </a:solidFill>
-                        </a:rPr>
-                        <a:t>Description</a:t>
-                      </a:r>
-                      <a:endParaRPr lang="en-US" sz="1400" dirty="0"/>
-                    </a:p>
-                  </a:txBody>
-                  <a:tcPr>
-                    <a:lnL w="6350" cap="flat" cmpd="sng" algn="ctr">
-                      <a:solidFill>
-                        <a:srgbClr val="E5E7EB"/>
-                      </a:solidFill>
-                      <a:prstDash val="solid"/>
-                      <a:round/>
-                      <a:headEnd type="none" w="med" len="med"/>
-                      <a:tailEnd type="none" w="med" len="med"/>
-                    </a:lnL>
-                    <a:lnR w="6350" cap="flat" cmpd="sng" algn="ctr">
-                      <a:solidFill>
-                        <a:srgbClr val="E5E7EB"/>
-                      </a:solidFill>
-                      <a:prstDash val="solid"/>
-                      <a:round/>
-                      <a:headEnd type="none" w="med" len="med"/>
-                      <a:tailEnd type="none" w="med" len="med"/>
-                    </a:lnR>
-                    <a:lnT w="6350" cap="flat" cmpd="sng" algn="ctr">
-                      <a:solidFill>
-                        <a:srgbClr val="E5E7EB"/>
-                      </a:solidFill>
-                      <a:prstDash val="solid"/>
-                      <a:round/>
-                      <a:headEnd type="none" w="med" len="med"/>
-                      <a:tailEnd type="none" w="med" len="med"/>
-                    </a:lnT>
-                    <a:lnB w="6350" cap="flat" cmpd="sng" algn="ctr">
-                      <a:solidFill>
-                        <a:srgbClr val="E5E7EB"/>
-                      </a:solidFill>
-                      <a:prstDash val="solid"/>
-                      <a:round/>
-                      <a:headEnd type="none" w="med" len="med"/>
-                      <a:tailEnd type="none" w="med" len="med"/>
-                    </a:lnB>
-                    <a:solidFill>
-                      <a:srgbClr val="1B2B5E"/>
-                    </a:solidFill>
-                  </a:tcPr>
-                </a:tc>
-                <a:extLst>
-                  <a:ext uri="{0D108BD9-81ED-4DB2-BD59-A6C34878D82A}">
-                    <a16:rowId xmlns:a16="http://schemas.microsoft.com/office/drawing/2014/main" val="10000"/>
-                  </a:ext>
-                </a:extLst>
-              </a:tr>
-              <a:tr h="438912">
-                <a:tc>
-                  <a:txBody>
-                    <a:bodyPr/>
-                    <a:lstStyle/>
-                    <a:p>
-                      <a:pPr marL="0" indent="0">
-                        <a:buNone/>
-                      </a:pPr>
-                      <a:r>
-                        <a:rPr lang="en-US" sz="1300" b="1" dirty="0">
-                          <a:solidFill>
-                            <a:srgbClr val="1B2B5E"/>
-                          </a:solidFill>
-                        </a:rPr>
-                        <a:t>Linear Regression</a:t>
-                      </a:r>
-                      <a:endParaRPr lang="en-US" sz="1300" dirty="0"/>
-                    </a:p>
-                  </a:txBody>
-                  <a:tcPr>
-                    <a:lnL w="6350" cap="flat" cmpd="sng" algn="ctr">
-                      <a:solidFill>
-                        <a:srgbClr val="E5E7EB"/>
-                      </a:solidFill>
-                      <a:prstDash val="solid"/>
-                      <a:round/>
-                      <a:headEnd type="none" w="med" len="med"/>
-                      <a:tailEnd type="none" w="med" len="med"/>
-                    </a:lnL>
-                    <a:lnR w="6350" cap="flat" cmpd="sng" algn="ctr">
-                      <a:solidFill>
-                        <a:srgbClr val="E5E7EB"/>
-                      </a:solidFill>
-                      <a:prstDash val="solid"/>
-                      <a:round/>
-                      <a:headEnd type="none" w="med" len="med"/>
-                      <a:tailEnd type="none" w="med" len="med"/>
-                    </a:lnR>
-                    <a:lnT w="6350" cap="flat" cmpd="sng" algn="ctr">
-                      <a:solidFill>
-                        <a:srgbClr val="E5E7EB"/>
-                      </a:solidFill>
-                      <a:prstDash val="solid"/>
-                      <a:round/>
-                      <a:headEnd type="none" w="med" len="med"/>
-                      <a:tailEnd type="none" w="med" len="med"/>
-                    </a:lnT>
-                    <a:lnB w="6350" cap="flat" cmpd="sng" algn="ctr">
-                      <a:solidFill>
-                        <a:srgbClr val="E5E7EB"/>
-                      </a:solidFill>
-                      <a:prstDash val="solid"/>
-                      <a:round/>
-                      <a:headEnd type="none" w="med" len="med"/>
-                      <a:tailEnd type="none" w="med" len="med"/>
-                    </a:lnB>
-                    <a:solidFill>
-                      <a:srgbClr val="FFFFFF"/>
-                    </a:solidFill>
-                  </a:tcPr>
-                </a:tc>
-                <a:tc>
-                  <a:txBody>
-                    <a:bodyPr/>
-                    <a:lstStyle/>
-                    <a:p>
-                      <a:pPr marL="0" indent="0">
-                        <a:buNone/>
-                      </a:pPr>
-                      <a:r>
-                        <a:rPr lang="en-US" sz="1300" dirty="0">
-                          <a:solidFill>
-                            <a:srgbClr val="374151"/>
-                          </a:solidFill>
-                        </a:rPr>
-                        <a:t>Statistical</a:t>
-                      </a:r>
-                      <a:endParaRPr lang="en-US" sz="1300" dirty="0"/>
-                    </a:p>
-                  </a:txBody>
-                  <a:tcPr>
-                    <a:lnL w="6350" cap="flat" cmpd="sng" algn="ctr">
-                      <a:solidFill>
-                        <a:srgbClr val="E5E7EB"/>
-                      </a:solidFill>
-                      <a:prstDash val="solid"/>
-                      <a:round/>
-                      <a:headEnd type="none" w="med" len="med"/>
-                      <a:tailEnd type="none" w="med" len="med"/>
-                    </a:lnL>
-                    <a:lnR w="6350" cap="flat" cmpd="sng" algn="ctr">
-                      <a:solidFill>
-                        <a:srgbClr val="E5E7EB"/>
-                      </a:solidFill>
-                      <a:prstDash val="solid"/>
-                      <a:round/>
-                      <a:headEnd type="none" w="med" len="med"/>
-                      <a:tailEnd type="none" w="med" len="med"/>
-                    </a:lnR>
-                    <a:lnT w="6350" cap="flat" cmpd="sng" algn="ctr">
-                      <a:solidFill>
-                        <a:srgbClr val="E5E7EB"/>
-                      </a:solidFill>
-                      <a:prstDash val="solid"/>
-                      <a:round/>
-                      <a:headEnd type="none" w="med" len="med"/>
-                      <a:tailEnd type="none" w="med" len="med"/>
-                    </a:lnT>
-                    <a:lnB w="6350" cap="flat" cmpd="sng" algn="ctr">
-                      <a:solidFill>
-                        <a:srgbClr val="E5E7EB"/>
-                      </a:solidFill>
-                      <a:prstDash val="solid"/>
-                      <a:round/>
-                      <a:headEnd type="none" w="med" len="med"/>
-                      <a:tailEnd type="none" w="med" len="med"/>
-                    </a:lnB>
-                    <a:solidFill>
-                      <a:srgbClr val="FFFFFF"/>
-                    </a:solidFill>
-                  </a:tcPr>
-                </a:tc>
-                <a:tc>
-                  <a:txBody>
-                    <a:bodyPr/>
-                    <a:lstStyle/>
-                    <a:p>
-                      <a:pPr marL="0" indent="0">
-                        <a:buNone/>
-                      </a:pPr>
-                      <a:r>
-                        <a:rPr lang="en-US" sz="1300" dirty="0">
-                          <a:solidFill>
-                            <a:srgbClr val="374151"/>
-                          </a:solidFill>
-                        </a:rPr>
-                        <a:t>Baseline model — fits a straight line to historical data</a:t>
-                      </a:r>
-                      <a:endParaRPr lang="en-US" sz="1300" dirty="0"/>
-                    </a:p>
-                  </a:txBody>
-                  <a:tcPr>
-                    <a:lnL w="6350" cap="flat" cmpd="sng" algn="ctr">
-                      <a:solidFill>
-                        <a:srgbClr val="E5E7EB"/>
-                      </a:solidFill>
-                      <a:prstDash val="solid"/>
-                      <a:round/>
-                      <a:headEnd type="none" w="med" len="med"/>
-                      <a:tailEnd type="none" w="med" len="med"/>
-                    </a:lnL>
-                    <a:lnR w="6350" cap="flat" cmpd="sng" algn="ctr">
-                      <a:solidFill>
-                        <a:srgbClr val="E5E7EB"/>
-                      </a:solidFill>
-                      <a:prstDash val="solid"/>
-                      <a:round/>
-                      <a:headEnd type="none" w="med" len="med"/>
-                      <a:tailEnd type="none" w="med" len="med"/>
-                    </a:lnR>
-                    <a:lnT w="6350" cap="flat" cmpd="sng" algn="ctr">
-                      <a:solidFill>
-                        <a:srgbClr val="E5E7EB"/>
-                      </a:solidFill>
-                      <a:prstDash val="solid"/>
-                      <a:round/>
-                      <a:headEnd type="none" w="med" len="med"/>
-                      <a:tailEnd type="none" w="med" len="med"/>
-                    </a:lnT>
-                    <a:lnB w="6350" cap="flat" cmpd="sng" algn="ctr">
-                      <a:solidFill>
-                        <a:srgbClr val="E5E7EB"/>
-                      </a:solidFill>
-                      <a:prstDash val="solid"/>
-                      <a:round/>
-                      <a:headEnd type="none" w="med" len="med"/>
-                      <a:tailEnd type="none" w="med" len="med"/>
-                    </a:lnB>
-                    <a:solidFill>
-                      <a:srgbClr val="FFFFFF"/>
-                    </a:solidFill>
-                  </a:tcPr>
-                </a:tc>
-                <a:extLst>
-                  <a:ext uri="{0D108BD9-81ED-4DB2-BD59-A6C34878D82A}">
-                    <a16:rowId xmlns:a16="http://schemas.microsoft.com/office/drawing/2014/main" val="10001"/>
-                  </a:ext>
-                </a:extLst>
-              </a:tr>
-              <a:tr h="438912">
-                <a:tc>
-                  <a:txBody>
-                    <a:bodyPr/>
-                    <a:lstStyle/>
-                    <a:p>
-                      <a:pPr marL="0" indent="0">
-                        <a:buNone/>
-                      </a:pPr>
-                      <a:r>
-                        <a:rPr lang="en-US" sz="1300" b="1" dirty="0">
-                          <a:solidFill>
-                            <a:srgbClr val="1B2B5E"/>
-                          </a:solidFill>
-                        </a:rPr>
-                        <a:t>XGBoost</a:t>
-                      </a:r>
-                      <a:endParaRPr lang="en-US" sz="1300" dirty="0"/>
-                    </a:p>
-                  </a:txBody>
-                  <a:tcPr>
-                    <a:lnL w="6350" cap="flat" cmpd="sng" algn="ctr">
-                      <a:solidFill>
-                        <a:srgbClr val="E5E7EB"/>
-                      </a:solidFill>
-                      <a:prstDash val="solid"/>
-                      <a:round/>
-                      <a:headEnd type="none" w="med" len="med"/>
-                      <a:tailEnd type="none" w="med" len="med"/>
-                    </a:lnL>
-                    <a:lnR w="6350" cap="flat" cmpd="sng" algn="ctr">
-                      <a:solidFill>
-                        <a:srgbClr val="E5E7EB"/>
-                      </a:solidFill>
-                      <a:prstDash val="solid"/>
-                      <a:round/>
-                      <a:headEnd type="none" w="med" len="med"/>
-                      <a:tailEnd type="none" w="med" len="med"/>
-                    </a:lnR>
-                    <a:lnT w="6350" cap="flat" cmpd="sng" algn="ctr">
-                      <a:solidFill>
-                        <a:srgbClr val="E5E7EB"/>
-                      </a:solidFill>
-                      <a:prstDash val="solid"/>
-                      <a:round/>
-                      <a:headEnd type="none" w="med" len="med"/>
-                      <a:tailEnd type="none" w="med" len="med"/>
-                    </a:lnT>
-                    <a:lnB w="6350" cap="flat" cmpd="sng" algn="ctr">
-                      <a:solidFill>
-                        <a:srgbClr val="E5E7EB"/>
-                      </a:solidFill>
-                      <a:prstDash val="solid"/>
-                      <a:round/>
-                      <a:headEnd type="none" w="med" len="med"/>
-                      <a:tailEnd type="none" w="med" len="med"/>
-                    </a:lnB>
-                    <a:solidFill>
-                      <a:srgbClr val="FFFFFF"/>
-                    </a:solidFill>
-                  </a:tcPr>
-                </a:tc>
-                <a:tc>
-                  <a:txBody>
-                    <a:bodyPr/>
-                    <a:lstStyle/>
-                    <a:p>
-                      <a:pPr marL="0" indent="0">
-                        <a:buNone/>
-                      </a:pPr>
-                      <a:r>
-                        <a:rPr lang="en-US" sz="1300" dirty="0">
-                          <a:solidFill>
-                            <a:srgbClr val="374151"/>
-                          </a:solidFill>
-                        </a:rPr>
-                        <a:t>Machine Learning</a:t>
-                      </a:r>
-                      <a:endParaRPr lang="en-US" sz="1300" dirty="0"/>
-                    </a:p>
-                  </a:txBody>
-                  <a:tcPr>
-                    <a:lnL w="6350" cap="flat" cmpd="sng" algn="ctr">
-                      <a:solidFill>
-                        <a:srgbClr val="E5E7EB"/>
-                      </a:solidFill>
-                      <a:prstDash val="solid"/>
-                      <a:round/>
-                      <a:headEnd type="none" w="med" len="med"/>
-                      <a:tailEnd type="none" w="med" len="med"/>
-                    </a:lnL>
-                    <a:lnR w="6350" cap="flat" cmpd="sng" algn="ctr">
-                      <a:solidFill>
-                        <a:srgbClr val="E5E7EB"/>
-                      </a:solidFill>
-                      <a:prstDash val="solid"/>
-                      <a:round/>
-                      <a:headEnd type="none" w="med" len="med"/>
-                      <a:tailEnd type="none" w="med" len="med"/>
-                    </a:lnR>
-                    <a:lnT w="6350" cap="flat" cmpd="sng" algn="ctr">
-                      <a:solidFill>
-                        <a:srgbClr val="E5E7EB"/>
-                      </a:solidFill>
-                      <a:prstDash val="solid"/>
-                      <a:round/>
-                      <a:headEnd type="none" w="med" len="med"/>
-                      <a:tailEnd type="none" w="med" len="med"/>
-                    </a:lnT>
-                    <a:lnB w="6350" cap="flat" cmpd="sng" algn="ctr">
-                      <a:solidFill>
-                        <a:srgbClr val="E5E7EB"/>
-                      </a:solidFill>
-                      <a:prstDash val="solid"/>
-                      <a:round/>
-                      <a:headEnd type="none" w="med" len="med"/>
-                      <a:tailEnd type="none" w="med" len="med"/>
-                    </a:lnB>
-                    <a:solidFill>
-                      <a:srgbClr val="FFFFFF"/>
-                    </a:solidFill>
-                  </a:tcPr>
-                </a:tc>
-                <a:tc>
-                  <a:txBody>
-                    <a:bodyPr/>
-                    <a:lstStyle/>
-                    <a:p>
-                      <a:pPr marL="0" indent="0">
-                        <a:buNone/>
-                      </a:pPr>
-                      <a:r>
-                        <a:rPr lang="en-US" sz="1300" dirty="0">
-                          <a:solidFill>
-                            <a:srgbClr val="374151"/>
-                          </a:solidFill>
-                        </a:rPr>
-                        <a:t>Gradient boosting ensemble algorithm</a:t>
-                      </a:r>
-                      <a:endParaRPr lang="en-US" sz="1300" dirty="0"/>
-                    </a:p>
-                  </a:txBody>
-                  <a:tcPr>
-                    <a:lnL w="6350" cap="flat" cmpd="sng" algn="ctr">
-                      <a:solidFill>
-                        <a:srgbClr val="E5E7EB"/>
-                      </a:solidFill>
-                      <a:prstDash val="solid"/>
-                      <a:round/>
-                      <a:headEnd type="none" w="med" len="med"/>
-                      <a:tailEnd type="none" w="med" len="med"/>
-                    </a:lnL>
-                    <a:lnR w="6350" cap="flat" cmpd="sng" algn="ctr">
-                      <a:solidFill>
-                        <a:srgbClr val="E5E7EB"/>
-                      </a:solidFill>
-                      <a:prstDash val="solid"/>
-                      <a:round/>
-                      <a:headEnd type="none" w="med" len="med"/>
-                      <a:tailEnd type="none" w="med" len="med"/>
-                    </a:lnR>
-                    <a:lnT w="6350" cap="flat" cmpd="sng" algn="ctr">
-                      <a:solidFill>
-                        <a:srgbClr val="E5E7EB"/>
-                      </a:solidFill>
-                      <a:prstDash val="solid"/>
-                      <a:round/>
-                      <a:headEnd type="none" w="med" len="med"/>
-                      <a:tailEnd type="none" w="med" len="med"/>
-                    </a:lnT>
-                    <a:lnB w="6350" cap="flat" cmpd="sng" algn="ctr">
-                      <a:solidFill>
-                        <a:srgbClr val="E5E7EB"/>
-                      </a:solidFill>
-                      <a:prstDash val="solid"/>
-                      <a:round/>
-                      <a:headEnd type="none" w="med" len="med"/>
-                      <a:tailEnd type="none" w="med" len="med"/>
-                    </a:lnB>
-                    <a:solidFill>
-                      <a:srgbClr val="FFFFFF"/>
-                    </a:solidFill>
-                  </a:tcPr>
-                </a:tc>
-                <a:extLst>
-                  <a:ext uri="{0D108BD9-81ED-4DB2-BD59-A6C34878D82A}">
-                    <a16:rowId xmlns:a16="http://schemas.microsoft.com/office/drawing/2014/main" val="10002"/>
-                  </a:ext>
-                </a:extLst>
-              </a:tr>
-              <a:tr h="438912">
-                <a:tc>
-                  <a:txBody>
-                    <a:bodyPr/>
-                    <a:lstStyle/>
-                    <a:p>
-                      <a:pPr marL="0" indent="0">
-                        <a:buNone/>
-                      </a:pPr>
-                      <a:r>
-                        <a:rPr lang="en-US" sz="1300" b="1" dirty="0">
-                          <a:solidFill>
-                            <a:srgbClr val="1B2B5E"/>
-                          </a:solidFill>
-                        </a:rPr>
-                        <a:t>ANN</a:t>
-                      </a:r>
-                      <a:endParaRPr lang="en-US" sz="1300" dirty="0"/>
-                    </a:p>
-                  </a:txBody>
-                  <a:tcPr>
-                    <a:lnL w="6350" cap="flat" cmpd="sng" algn="ctr">
-                      <a:solidFill>
-                        <a:srgbClr val="E5E7EB"/>
-                      </a:solidFill>
-                      <a:prstDash val="solid"/>
-                      <a:round/>
-                      <a:headEnd type="none" w="med" len="med"/>
-                      <a:tailEnd type="none" w="med" len="med"/>
-                    </a:lnL>
-                    <a:lnR w="6350" cap="flat" cmpd="sng" algn="ctr">
-                      <a:solidFill>
-                        <a:srgbClr val="E5E7EB"/>
-                      </a:solidFill>
-                      <a:prstDash val="solid"/>
-                      <a:round/>
-                      <a:headEnd type="none" w="med" len="med"/>
-                      <a:tailEnd type="none" w="med" len="med"/>
-                    </a:lnR>
-                    <a:lnT w="6350" cap="flat" cmpd="sng" algn="ctr">
-                      <a:solidFill>
-                        <a:srgbClr val="E5E7EB"/>
-                      </a:solidFill>
-                      <a:prstDash val="solid"/>
-                      <a:round/>
-                      <a:headEnd type="none" w="med" len="med"/>
-                      <a:tailEnd type="none" w="med" len="med"/>
-                    </a:lnT>
-                    <a:lnB w="6350" cap="flat" cmpd="sng" algn="ctr">
-                      <a:solidFill>
-                        <a:srgbClr val="E5E7EB"/>
-                      </a:solidFill>
-                      <a:prstDash val="solid"/>
-                      <a:round/>
-                      <a:headEnd type="none" w="med" len="med"/>
-                      <a:tailEnd type="none" w="med" len="med"/>
-                    </a:lnB>
-                    <a:solidFill>
-                      <a:srgbClr val="FFFFFF"/>
-                    </a:solidFill>
-                  </a:tcPr>
-                </a:tc>
-                <a:tc>
-                  <a:txBody>
-                    <a:bodyPr/>
-                    <a:lstStyle/>
-                    <a:p>
-                      <a:pPr marL="0" indent="0">
-                        <a:buNone/>
-                      </a:pPr>
-                      <a:r>
-                        <a:rPr lang="en-US" sz="1300" dirty="0">
-                          <a:solidFill>
-                            <a:srgbClr val="374151"/>
-                          </a:solidFill>
-                        </a:rPr>
-                        <a:t>Deep Learning</a:t>
-                      </a:r>
-                      <a:endParaRPr lang="en-US" sz="1300" dirty="0"/>
-                    </a:p>
-                  </a:txBody>
-                  <a:tcPr>
-                    <a:lnL w="6350" cap="flat" cmpd="sng" algn="ctr">
-                      <a:solidFill>
-                        <a:srgbClr val="E5E7EB"/>
-                      </a:solidFill>
-                      <a:prstDash val="solid"/>
-                      <a:round/>
-                      <a:headEnd type="none" w="med" len="med"/>
-                      <a:tailEnd type="none" w="med" len="med"/>
-                    </a:lnL>
-                    <a:lnR w="6350" cap="flat" cmpd="sng" algn="ctr">
-                      <a:solidFill>
-                        <a:srgbClr val="E5E7EB"/>
-                      </a:solidFill>
-                      <a:prstDash val="solid"/>
-                      <a:round/>
-                      <a:headEnd type="none" w="med" len="med"/>
-                      <a:tailEnd type="none" w="med" len="med"/>
-                    </a:lnR>
-                    <a:lnT w="6350" cap="flat" cmpd="sng" algn="ctr">
-                      <a:solidFill>
-                        <a:srgbClr val="E5E7EB"/>
-                      </a:solidFill>
-                      <a:prstDash val="solid"/>
-                      <a:round/>
-                      <a:headEnd type="none" w="med" len="med"/>
-                      <a:tailEnd type="none" w="med" len="med"/>
-                    </a:lnT>
-                    <a:lnB w="6350" cap="flat" cmpd="sng" algn="ctr">
-                      <a:solidFill>
-                        <a:srgbClr val="E5E7EB"/>
-                      </a:solidFill>
-                      <a:prstDash val="solid"/>
-                      <a:round/>
-                      <a:headEnd type="none" w="med" len="med"/>
-                      <a:tailEnd type="none" w="med" len="med"/>
-                    </a:lnB>
-                    <a:solidFill>
-                      <a:srgbClr val="FFFFFF"/>
-                    </a:solidFill>
-                  </a:tcPr>
-                </a:tc>
-                <a:tc>
-                  <a:txBody>
-                    <a:bodyPr/>
-                    <a:lstStyle/>
-                    <a:p>
-                      <a:pPr marL="0" indent="0">
-                        <a:buNone/>
-                      </a:pPr>
-                      <a:r>
-                        <a:rPr lang="en-US" sz="1300" dirty="0">
-                          <a:solidFill>
-                            <a:srgbClr val="374151"/>
-                          </a:solidFill>
-                        </a:rPr>
-                        <a:t>Artificial Neural Network with hidden layers</a:t>
-                      </a:r>
-                      <a:endParaRPr lang="en-US" sz="1300" dirty="0"/>
-                    </a:p>
-                  </a:txBody>
-                  <a:tcPr>
-                    <a:lnL w="6350" cap="flat" cmpd="sng" algn="ctr">
-                      <a:solidFill>
-                        <a:srgbClr val="E5E7EB"/>
-                      </a:solidFill>
-                      <a:prstDash val="solid"/>
-                      <a:round/>
-                      <a:headEnd type="none" w="med" len="med"/>
-                      <a:tailEnd type="none" w="med" len="med"/>
-                    </a:lnL>
-                    <a:lnR w="6350" cap="flat" cmpd="sng" algn="ctr">
-                      <a:solidFill>
-                        <a:srgbClr val="E5E7EB"/>
-                      </a:solidFill>
-                      <a:prstDash val="solid"/>
-                      <a:round/>
-                      <a:headEnd type="none" w="med" len="med"/>
-                      <a:tailEnd type="none" w="med" len="med"/>
-                    </a:lnR>
-                    <a:lnT w="6350" cap="flat" cmpd="sng" algn="ctr">
-                      <a:solidFill>
-                        <a:srgbClr val="E5E7EB"/>
-                      </a:solidFill>
-                      <a:prstDash val="solid"/>
-                      <a:round/>
-                      <a:headEnd type="none" w="med" len="med"/>
-                      <a:tailEnd type="none" w="med" len="med"/>
-                    </a:lnT>
-                    <a:lnB w="6350" cap="flat" cmpd="sng" algn="ctr">
-                      <a:solidFill>
-                        <a:srgbClr val="E5E7EB"/>
-                      </a:solidFill>
-                      <a:prstDash val="solid"/>
-                      <a:round/>
-                      <a:headEnd type="none" w="med" len="med"/>
-                      <a:tailEnd type="none" w="med" len="med"/>
-                    </a:lnB>
-                    <a:solidFill>
-                      <a:srgbClr val="FFFFFF"/>
-                    </a:solidFill>
-                  </a:tcPr>
-                </a:tc>
-                <a:extLst>
-                  <a:ext uri="{0D108BD9-81ED-4DB2-BD59-A6C34878D82A}">
-                    <a16:rowId xmlns:a16="http://schemas.microsoft.com/office/drawing/2014/main" val="10003"/>
-                  </a:ext>
-                </a:extLst>
-              </a:tr>
-              <a:tr h="438912">
-                <a:tc>
-                  <a:txBody>
-                    <a:bodyPr/>
-                    <a:lstStyle/>
-                    <a:p>
-                      <a:pPr marL="0" indent="0">
-                        <a:buNone/>
-                      </a:pPr>
-                      <a:r>
-                        <a:rPr lang="en-US" sz="1300" b="1" dirty="0">
-                          <a:solidFill>
-                            <a:srgbClr val="1B2B5E"/>
-                          </a:solidFill>
-                        </a:rPr>
-                        <a:t>LSTM</a:t>
-                      </a:r>
-                      <a:endParaRPr lang="en-US" sz="1300" dirty="0"/>
-                    </a:p>
-                  </a:txBody>
-                  <a:tcPr>
-                    <a:lnL w="6350" cap="flat" cmpd="sng" algn="ctr">
-                      <a:solidFill>
-                        <a:srgbClr val="E5E7EB"/>
-                      </a:solidFill>
-                      <a:prstDash val="solid"/>
-                      <a:round/>
-                      <a:headEnd type="none" w="med" len="med"/>
-                      <a:tailEnd type="none" w="med" len="med"/>
-                    </a:lnL>
-                    <a:lnR w="6350" cap="flat" cmpd="sng" algn="ctr">
-                      <a:solidFill>
-                        <a:srgbClr val="E5E7EB"/>
-                      </a:solidFill>
-                      <a:prstDash val="solid"/>
-                      <a:round/>
-                      <a:headEnd type="none" w="med" len="med"/>
-                      <a:tailEnd type="none" w="med" len="med"/>
-                    </a:lnR>
-                    <a:lnT w="6350" cap="flat" cmpd="sng" algn="ctr">
-                      <a:solidFill>
-                        <a:srgbClr val="E5E7EB"/>
-                      </a:solidFill>
-                      <a:prstDash val="solid"/>
-                      <a:round/>
-                      <a:headEnd type="none" w="med" len="med"/>
-                      <a:tailEnd type="none" w="med" len="med"/>
-                    </a:lnT>
-                    <a:lnB w="6350" cap="flat" cmpd="sng" algn="ctr">
-                      <a:solidFill>
-                        <a:srgbClr val="E5E7EB"/>
-                      </a:solidFill>
-                      <a:prstDash val="solid"/>
-                      <a:round/>
-                      <a:headEnd type="none" w="med" len="med"/>
-                      <a:tailEnd type="none" w="med" len="med"/>
-                    </a:lnB>
-                    <a:solidFill>
-                      <a:srgbClr val="FFFFFF"/>
-                    </a:solidFill>
-                  </a:tcPr>
-                </a:tc>
-                <a:tc>
-                  <a:txBody>
-                    <a:bodyPr/>
-                    <a:lstStyle/>
-                    <a:p>
-                      <a:pPr marL="0" indent="0">
-                        <a:buNone/>
-                      </a:pPr>
-                      <a:r>
-                        <a:rPr lang="en-US" sz="1300" dirty="0">
-                          <a:solidFill>
-                            <a:srgbClr val="374151"/>
-                          </a:solidFill>
-                        </a:rPr>
-                        <a:t>Deep Learning</a:t>
-                      </a:r>
-                      <a:endParaRPr lang="en-US" sz="1300" dirty="0"/>
-                    </a:p>
-                  </a:txBody>
-                  <a:tcPr>
-                    <a:lnL w="6350" cap="flat" cmpd="sng" algn="ctr">
-                      <a:solidFill>
-                        <a:srgbClr val="E5E7EB"/>
-                      </a:solidFill>
-                      <a:prstDash val="solid"/>
-                      <a:round/>
-                      <a:headEnd type="none" w="med" len="med"/>
-                      <a:tailEnd type="none" w="med" len="med"/>
-                    </a:lnL>
-                    <a:lnR w="6350" cap="flat" cmpd="sng" algn="ctr">
-                      <a:solidFill>
-                        <a:srgbClr val="E5E7EB"/>
-                      </a:solidFill>
-                      <a:prstDash val="solid"/>
-                      <a:round/>
-                      <a:headEnd type="none" w="med" len="med"/>
-                      <a:tailEnd type="none" w="med" len="med"/>
-                    </a:lnR>
-                    <a:lnT w="6350" cap="flat" cmpd="sng" algn="ctr">
-                      <a:solidFill>
-                        <a:srgbClr val="E5E7EB"/>
-                      </a:solidFill>
-                      <a:prstDash val="solid"/>
-                      <a:round/>
-                      <a:headEnd type="none" w="med" len="med"/>
-                      <a:tailEnd type="none" w="med" len="med"/>
-                    </a:lnT>
-                    <a:lnB w="6350" cap="flat" cmpd="sng" algn="ctr">
-                      <a:solidFill>
-                        <a:srgbClr val="E5E7EB"/>
-                      </a:solidFill>
-                      <a:prstDash val="solid"/>
-                      <a:round/>
-                      <a:headEnd type="none" w="med" len="med"/>
-                      <a:tailEnd type="none" w="med" len="med"/>
-                    </a:lnB>
-                    <a:solidFill>
-                      <a:srgbClr val="FFFFFF"/>
-                    </a:solidFill>
-                  </a:tcPr>
-                </a:tc>
-                <a:tc>
-                  <a:txBody>
-                    <a:bodyPr/>
-                    <a:lstStyle/>
-                    <a:p>
-                      <a:pPr marL="0" indent="0">
-                        <a:buNone/>
-                      </a:pPr>
-                      <a:r>
-                        <a:rPr lang="en-US" sz="1300" dirty="0">
-                          <a:solidFill>
-                            <a:srgbClr val="374151"/>
-                          </a:solidFill>
-                        </a:rPr>
-                        <a:t>Long Short-Term Memory — suited for sequences</a:t>
-                      </a:r>
-                      <a:endParaRPr lang="en-US" sz="1300" dirty="0"/>
-                    </a:p>
-                  </a:txBody>
-                  <a:tcPr>
-                    <a:lnL w="6350" cap="flat" cmpd="sng" algn="ctr">
-                      <a:solidFill>
-                        <a:srgbClr val="E5E7EB"/>
-                      </a:solidFill>
-                      <a:prstDash val="solid"/>
-                      <a:round/>
-                      <a:headEnd type="none" w="med" len="med"/>
-                      <a:tailEnd type="none" w="med" len="med"/>
-                    </a:lnL>
-                    <a:lnR w="6350" cap="flat" cmpd="sng" algn="ctr">
-                      <a:solidFill>
-                        <a:srgbClr val="E5E7EB"/>
-                      </a:solidFill>
-                      <a:prstDash val="solid"/>
-                      <a:round/>
-                      <a:headEnd type="none" w="med" len="med"/>
-                      <a:tailEnd type="none" w="med" len="med"/>
-                    </a:lnR>
-                    <a:lnT w="6350" cap="flat" cmpd="sng" algn="ctr">
-                      <a:solidFill>
-                        <a:srgbClr val="E5E7EB"/>
-                      </a:solidFill>
-                      <a:prstDash val="solid"/>
-                      <a:round/>
-                      <a:headEnd type="none" w="med" len="med"/>
-                      <a:tailEnd type="none" w="med" len="med"/>
-                    </a:lnT>
-                    <a:lnB w="6350" cap="flat" cmpd="sng" algn="ctr">
-                      <a:solidFill>
-                        <a:srgbClr val="E5E7EB"/>
-                      </a:solidFill>
-                      <a:prstDash val="solid"/>
-                      <a:round/>
-                      <a:headEnd type="none" w="med" len="med"/>
-                      <a:tailEnd type="none" w="med" len="med"/>
-                    </a:lnB>
-                    <a:solidFill>
-                      <a:srgbClr val="FFFFFF"/>
-                    </a:solidFill>
-                  </a:tcPr>
-                </a:tc>
-                <a:extLst>
-                  <a:ext uri="{0D108BD9-81ED-4DB2-BD59-A6C34878D82A}">
-                    <a16:rowId xmlns:a16="http://schemas.microsoft.com/office/drawing/2014/main" val="10004"/>
-                  </a:ext>
-                </a:extLst>
-              </a:tr>
-              <a:tr h="438912">
-                <a:tc>
-                  <a:txBody>
-                    <a:bodyPr/>
-                    <a:lstStyle/>
-                    <a:p>
-                      <a:pPr marL="0" indent="0">
-                        <a:buNone/>
-                      </a:pPr>
-                      <a:r>
-                        <a:rPr lang="en-US" sz="1300" b="1" dirty="0">
-                          <a:solidFill>
-                            <a:srgbClr val="1B2B5E"/>
-                          </a:solidFill>
-                        </a:rPr>
-                        <a:t>ARIMA</a:t>
-                      </a:r>
-                      <a:endParaRPr lang="en-US" sz="1300" dirty="0"/>
-                    </a:p>
-                  </a:txBody>
-                  <a:tcPr>
-                    <a:lnL w="6350" cap="flat" cmpd="sng" algn="ctr">
-                      <a:solidFill>
-                        <a:srgbClr val="E5E7EB"/>
-                      </a:solidFill>
-                      <a:prstDash val="solid"/>
-                      <a:round/>
-                      <a:headEnd type="none" w="med" len="med"/>
-                      <a:tailEnd type="none" w="med" len="med"/>
-                    </a:lnL>
-                    <a:lnR w="6350" cap="flat" cmpd="sng" algn="ctr">
-                      <a:solidFill>
-                        <a:srgbClr val="E5E7EB"/>
-                      </a:solidFill>
-                      <a:prstDash val="solid"/>
-                      <a:round/>
-                      <a:headEnd type="none" w="med" len="med"/>
-                      <a:tailEnd type="none" w="med" len="med"/>
-                    </a:lnR>
-                    <a:lnT w="6350" cap="flat" cmpd="sng" algn="ctr">
-                      <a:solidFill>
-                        <a:srgbClr val="E5E7EB"/>
-                      </a:solidFill>
-                      <a:prstDash val="solid"/>
-                      <a:round/>
-                      <a:headEnd type="none" w="med" len="med"/>
-                      <a:tailEnd type="none" w="med" len="med"/>
-                    </a:lnT>
-                    <a:lnB w="6350" cap="flat" cmpd="sng" algn="ctr">
-                      <a:solidFill>
-                        <a:srgbClr val="E5E7EB"/>
-                      </a:solidFill>
-                      <a:prstDash val="solid"/>
-                      <a:round/>
-                      <a:headEnd type="none" w="med" len="med"/>
-                      <a:tailEnd type="none" w="med" len="med"/>
-                    </a:lnB>
-                    <a:solidFill>
-                      <a:srgbClr val="FFFFFF"/>
-                    </a:solidFill>
-                  </a:tcPr>
-                </a:tc>
-                <a:tc>
-                  <a:txBody>
-                    <a:bodyPr/>
-                    <a:lstStyle/>
-                    <a:p>
-                      <a:pPr marL="0" indent="0">
-                        <a:buNone/>
-                      </a:pPr>
-                      <a:r>
-                        <a:rPr lang="en-US" sz="1300" dirty="0">
-                          <a:solidFill>
-                            <a:srgbClr val="374151"/>
-                          </a:solidFill>
-                        </a:rPr>
-                        <a:t>Statistical</a:t>
-                      </a:r>
-                      <a:endParaRPr lang="en-US" sz="1300" dirty="0"/>
-                    </a:p>
-                  </a:txBody>
-                  <a:tcPr>
-                    <a:lnL w="6350" cap="flat" cmpd="sng" algn="ctr">
-                      <a:solidFill>
-                        <a:srgbClr val="E5E7EB"/>
-                      </a:solidFill>
-                      <a:prstDash val="solid"/>
-                      <a:round/>
-                      <a:headEnd type="none" w="med" len="med"/>
-                      <a:tailEnd type="none" w="med" len="med"/>
-                    </a:lnL>
-                    <a:lnR w="6350" cap="flat" cmpd="sng" algn="ctr">
-                      <a:solidFill>
-                        <a:srgbClr val="E5E7EB"/>
-                      </a:solidFill>
-                      <a:prstDash val="solid"/>
-                      <a:round/>
-                      <a:headEnd type="none" w="med" len="med"/>
-                      <a:tailEnd type="none" w="med" len="med"/>
-                    </a:lnR>
-                    <a:lnT w="6350" cap="flat" cmpd="sng" algn="ctr">
-                      <a:solidFill>
-                        <a:srgbClr val="E5E7EB"/>
-                      </a:solidFill>
-                      <a:prstDash val="solid"/>
-                      <a:round/>
-                      <a:headEnd type="none" w="med" len="med"/>
-                      <a:tailEnd type="none" w="med" len="med"/>
-                    </a:lnT>
-                    <a:lnB w="6350" cap="flat" cmpd="sng" algn="ctr">
-                      <a:solidFill>
-                        <a:srgbClr val="E5E7EB"/>
-                      </a:solidFill>
-                      <a:prstDash val="solid"/>
-                      <a:round/>
-                      <a:headEnd type="none" w="med" len="med"/>
-                      <a:tailEnd type="none" w="med" len="med"/>
-                    </a:lnB>
-                    <a:solidFill>
-                      <a:srgbClr val="FFFFFF"/>
-                    </a:solidFill>
-                  </a:tcPr>
-                </a:tc>
-                <a:tc>
-                  <a:txBody>
-                    <a:bodyPr/>
-                    <a:lstStyle/>
-                    <a:p>
-                      <a:pPr marL="0" indent="0">
-                        <a:buNone/>
-                      </a:pPr>
-                      <a:r>
-                        <a:rPr lang="en-US" sz="1300" dirty="0">
-                          <a:solidFill>
-                            <a:srgbClr val="374151"/>
-                          </a:solidFill>
-                        </a:rPr>
-                        <a:t>Auto-Regressive Integrated Moving Average model</a:t>
-                      </a:r>
-                      <a:endParaRPr lang="en-US" sz="1300" dirty="0"/>
-                    </a:p>
-                  </a:txBody>
-                  <a:tcPr>
-                    <a:lnL w="6350" cap="flat" cmpd="sng" algn="ctr">
-                      <a:solidFill>
-                        <a:srgbClr val="E5E7EB"/>
-                      </a:solidFill>
-                      <a:prstDash val="solid"/>
-                      <a:round/>
-                      <a:headEnd type="none" w="med" len="med"/>
-                      <a:tailEnd type="none" w="med" len="med"/>
-                    </a:lnL>
-                    <a:lnR w="6350" cap="flat" cmpd="sng" algn="ctr">
-                      <a:solidFill>
-                        <a:srgbClr val="E5E7EB"/>
-                      </a:solidFill>
-                      <a:prstDash val="solid"/>
-                      <a:round/>
-                      <a:headEnd type="none" w="med" len="med"/>
-                      <a:tailEnd type="none" w="med" len="med"/>
-                    </a:lnR>
-                    <a:lnT w="6350" cap="flat" cmpd="sng" algn="ctr">
-                      <a:solidFill>
-                        <a:srgbClr val="E5E7EB"/>
-                      </a:solidFill>
-                      <a:prstDash val="solid"/>
-                      <a:round/>
-                      <a:headEnd type="none" w="med" len="med"/>
-                      <a:tailEnd type="none" w="med" len="med"/>
-                    </a:lnT>
-                    <a:lnB w="6350" cap="flat" cmpd="sng" algn="ctr">
-                      <a:solidFill>
-                        <a:srgbClr val="E5E7EB"/>
-                      </a:solidFill>
-                      <a:prstDash val="solid"/>
-                      <a:round/>
-                      <a:headEnd type="none" w="med" len="med"/>
-                      <a:tailEnd type="none" w="med" len="med"/>
-                    </a:lnB>
-                    <a:solidFill>
-                      <a:srgbClr val="FFFFFF"/>
-                    </a:solidFill>
-                  </a:tcPr>
-                </a:tc>
-                <a:extLst>
-                  <a:ext uri="{0D108BD9-81ED-4DB2-BD59-A6C34878D82A}">
-                    <a16:rowId xmlns:a16="http://schemas.microsoft.com/office/drawing/2014/main" val="10005"/>
-                  </a:ext>
-                </a:extLst>
-              </a:tr>
-            </a:tbl>
-          </a:graphicData>
-        </a:graphic>
-      </p:graphicFrame>
-      <p:sp>
-        <p:nvSpPr>
-          <p:cNvPr id="5" name="Shape 2"/>
-          <p:cNvSpPr/>
-          <p:nvPr/>
-        </p:nvSpPr>
-        <p:spPr>
-          <a:xfrm>
-            <a:off x="365760" y="3977640"/>
-            <a:ext cx="8412480" cy="914400"/>
-          </a:xfrm>
-          <a:prstGeom prst="roundRect">
-            <a:avLst>
-              <a:gd name="adj" fmla="val 10000"/>
-            </a:avLst>
-          </a:prstGeom>
-          <a:solidFill>
-            <a:srgbClr val="DBEAFE"/>
-          </a:solidFill>
-          <a:ln w="12700">
-            <a:solidFill>
-              <a:srgbClr val="DBEAFE"/>
-            </a:solidFill>
-            <a:prstDash val="solid"/>
-          </a:ln>
-        </p:spPr>
-        <p:txBody>
-          <a:bodyPr/>
-          <a:lstStyle/>
-          <a:p>
-            <a:endParaRPr lang="en-CA"/>
-          </a:p>
-        </p:txBody>
-      </p:sp>
-      <p:sp>
-        <p:nvSpPr>
-          <p:cNvPr id="6" name="Text 3"/>
-          <p:cNvSpPr/>
-          <p:nvPr/>
-        </p:nvSpPr>
-        <p:spPr>
-          <a:xfrm>
-            <a:off x="594360" y="4005072"/>
-            <a:ext cx="2743200" cy="347472"/>
-          </a:xfrm>
-          <a:prstGeom prst="rect">
-            <a:avLst/>
-          </a:prstGeom>
-          <a:noFill/>
-          <a:ln/>
-        </p:spPr>
-        <p:txBody>
-          <a:bodyPr wrap="square" rtlCol="0" anchor="ctr"/>
-          <a:lstStyle/>
-          <a:p>
-            <a:pPr marL="0" indent="0">
-              <a:buNone/>
-            </a:pPr>
-            <a:r>
-              <a:rPr lang="en-US" sz="1300" b="1" dirty="0">
-                <a:solidFill>
-                  <a:srgbClr val="1B2B5E"/>
-                </a:solidFill>
-                <a:latin typeface="Cambria" pitchFamily="34" charset="0"/>
-                <a:ea typeface="Cambria" pitchFamily="34" charset="-122"/>
-                <a:cs typeface="Cambria" pitchFamily="34" charset="-120"/>
-              </a:rPr>
-              <a:t>Why compare multiple models?</a:t>
-            </a:r>
-            <a:endParaRPr lang="en-US" sz="1300" dirty="0"/>
-          </a:p>
-        </p:txBody>
-      </p:sp>
-      <p:sp>
-        <p:nvSpPr>
-          <p:cNvPr id="4" name="Text 4"/>
-          <p:cNvSpPr/>
-          <p:nvPr/>
-        </p:nvSpPr>
-        <p:spPr>
-          <a:xfrm>
-            <a:off x="3383280" y="4005072"/>
-            <a:ext cx="5212080" cy="841248"/>
-          </a:xfrm>
-          <a:prstGeom prst="rect">
-            <a:avLst/>
-          </a:prstGeom>
-          <a:noFill/>
-          <a:ln/>
-        </p:spPr>
-        <p:txBody>
-          <a:bodyPr wrap="square" rtlCol="0" anchor="ctr"/>
-          <a:lstStyle/>
-          <a:p>
-            <a:pPr marL="0" indent="0">
-              <a:buNone/>
-            </a:pPr>
-            <a:r>
-              <a:rPr lang="en-US" sz="1200" dirty="0">
-                <a:solidFill>
-                  <a:srgbClr val="374151"/>
-                </a:solidFill>
-                <a:latin typeface="Calibri" pitchFamily="34" charset="0"/>
-                <a:ea typeface="Calibri" pitchFamily="34" charset="-122"/>
-                <a:cs typeface="Calibri" pitchFamily="34" charset="-120"/>
-              </a:rPr>
-              <a:t>Different algorithms learn patterns differently   •   Enables fair accuracy comparison   •   Identifies the most suitable model for this dataset</a:t>
-            </a:r>
-            <a:endParaRPr lang="en-US" sz="1200" dirty="0"/>
-          </a:p>
-        </p:txBody>
-      </p:sp>
-    </p:spTree>
-  </p:cSld>
-  <p:clrMapOvr>
-    <a:masterClrMapping/>
-  </p:clrMapOvr>
-</p:sld>
-</file>
-
-<file path=ppt/slides/slide7.xml><?xml version="1.0" encoding="utf-8"?>
-<p:sld xmlns:a="http://schemas.openxmlformats.org/drawingml/2006/main" xmlns:r="http://schemas.openxmlformats.org/officeDocument/2006/relationships" xmlns:p="http://schemas.openxmlformats.org/presentationml/2006/main">
   <p:cSld name="Slide 7">
     <p:bg>
       <p:bgPr>
@@ -5909,7 +4419,7 @@
         <p:spPr>
           <a:xfrm>
             <a:off x="274320" y="777240"/>
-            <a:ext cx="4297680" cy="2743200"/>
+            <a:ext cx="4297680" cy="3200400"/>
           </a:xfrm>
           <a:prstGeom prst="rect">
             <a:avLst/>
@@ -5933,7 +4443,7 @@
         <p:spPr>
           <a:xfrm>
             <a:off x="4663440" y="777240"/>
-            <a:ext cx="4206240" cy="2743200"/>
+            <a:ext cx="4206240" cy="3200400"/>
           </a:xfrm>
           <a:prstGeom prst="rect">
             <a:avLst/>
@@ -5942,55 +4452,14 @@
       </p:pic>
       <p:sp>
         <p:nvSpPr>
-          <p:cNvPr id="6" name="Shape 2"/>
-          <p:cNvSpPr/>
-          <p:nvPr/>
-        </p:nvSpPr>
-        <p:spPr>
-          <a:xfrm>
-            <a:off x="274320" y="3657600"/>
-            <a:ext cx="2651760" cy="1234440"/>
-          </a:xfrm>
-          <a:prstGeom prst="roundRect">
-            <a:avLst>
-              <a:gd name="adj" fmla="val 6667"/>
-            </a:avLst>
-          </a:prstGeom>
-          <a:solidFill>
-            <a:srgbClr val="FFFFFF"/>
-          </a:solidFill>
-          <a:ln w="12700">
-            <a:solidFill>
-              <a:srgbClr val="E5E7EB"/>
-            </a:solidFill>
-            <a:prstDash val="solid"/>
-          </a:ln>
-          <a:effectLst>
-            <a:outerShdw blurRad="63500" dist="25400" dir="2700000" algn="bl" rotWithShape="0">
-              <a:srgbClr val="000000">
-                <a:alpha val="8000"/>
-              </a:srgbClr>
-            </a:outerShdw>
-          </a:effectLst>
-        </p:spPr>
-        <p:txBody>
-          <a:bodyPr/>
-          <a:lstStyle/>
-          <a:p>
-            <a:endParaRPr lang="en-CA"/>
-          </a:p>
-        </p:txBody>
-      </p:sp>
-      <p:sp>
-        <p:nvSpPr>
-          <p:cNvPr id="7" name="Text 3"/>
-          <p:cNvSpPr/>
-          <p:nvPr/>
-        </p:nvSpPr>
-        <p:spPr>
-          <a:xfrm>
-            <a:off x="274320" y="3721608"/>
-            <a:ext cx="2651760" cy="411480"/>
+          <p:cNvPr id="16" name="Text 12"/>
+          <p:cNvSpPr/>
+          <p:nvPr/>
+        </p:nvSpPr>
+        <p:spPr>
+          <a:xfrm>
+            <a:off x="8887968" y="3749040"/>
+            <a:ext cx="0" cy="0"/>
           </a:xfrm>
           <a:prstGeom prst="rect">
             <a:avLst/>
@@ -6002,356 +4471,6 @@
           <a:bodyPr wrap="square" rtlCol="0" anchor="ctr"/>
           <a:lstStyle/>
           <a:p>
-            <a:pPr marL="0" indent="0" algn="ctr">
-              <a:buNone/>
-            </a:pPr>
-            <a:r>
-              <a:rPr lang="en-US" sz="1800" b="1" dirty="0">
-                <a:solidFill>
-                  <a:srgbClr val="2563EB"/>
-                </a:solidFill>
-                <a:latin typeface="Cambria" pitchFamily="34" charset="0"/>
-                <a:ea typeface="Cambria" pitchFamily="34" charset="-122"/>
-                <a:cs typeface="Cambria" pitchFamily="34" charset="-120"/>
-              </a:rPr>
-              <a:t>MAE</a:t>
-            </a:r>
-            <a:endParaRPr lang="en-US" sz="1800" dirty="0"/>
-          </a:p>
-        </p:txBody>
-      </p:sp>
-      <p:sp>
-        <p:nvSpPr>
-          <p:cNvPr id="8" name="Text 4"/>
-          <p:cNvSpPr/>
-          <p:nvPr/>
-        </p:nvSpPr>
-        <p:spPr>
-          <a:xfrm>
-            <a:off x="274320" y="4178808"/>
-            <a:ext cx="2651760" cy="640080"/>
-          </a:xfrm>
-          <a:prstGeom prst="rect">
-            <a:avLst/>
-          </a:prstGeom>
-          <a:noFill/>
-          <a:ln/>
-        </p:spPr>
-        <p:txBody>
-          <a:bodyPr wrap="square" rtlCol="0" anchor="ctr"/>
-          <a:lstStyle/>
-          <a:p>
-            <a:pPr marL="0" indent="0" algn="ctr">
-              <a:buNone/>
-            </a:pPr>
-            <a:r>
-              <a:rPr lang="en-US" sz="1100" dirty="0">
-                <a:solidFill>
-                  <a:srgbClr val="6B7280"/>
-                </a:solidFill>
-                <a:latin typeface="Calibri" pitchFamily="34" charset="0"/>
-                <a:ea typeface="Calibri" pitchFamily="34" charset="-122"/>
-                <a:cs typeface="Calibri" pitchFamily="34" charset="-120"/>
-              </a:rPr>
-              <a:t>Mean Absolute Error</a:t>
-            </a:r>
-            <a:endParaRPr lang="en-US" sz="1100" dirty="0"/>
-          </a:p>
-        </p:txBody>
-      </p:sp>
-      <p:sp>
-        <p:nvSpPr>
-          <p:cNvPr id="9" name="Shape 5"/>
-          <p:cNvSpPr/>
-          <p:nvPr/>
-        </p:nvSpPr>
-        <p:spPr>
-          <a:xfrm>
-            <a:off x="3154680" y="3657600"/>
-            <a:ext cx="2651760" cy="1234440"/>
-          </a:xfrm>
-          <a:prstGeom prst="roundRect">
-            <a:avLst>
-              <a:gd name="adj" fmla="val 6667"/>
-            </a:avLst>
-          </a:prstGeom>
-          <a:solidFill>
-            <a:srgbClr val="FFFFFF"/>
-          </a:solidFill>
-          <a:ln w="12700">
-            <a:solidFill>
-              <a:srgbClr val="E5E7EB"/>
-            </a:solidFill>
-            <a:prstDash val="solid"/>
-          </a:ln>
-          <a:effectLst>
-            <a:outerShdw blurRad="63500" dist="25400" dir="2700000" algn="bl" rotWithShape="0">
-              <a:srgbClr val="000000">
-                <a:alpha val="8000"/>
-              </a:srgbClr>
-            </a:outerShdw>
-          </a:effectLst>
-        </p:spPr>
-        <p:txBody>
-          <a:bodyPr/>
-          <a:lstStyle/>
-          <a:p>
-            <a:endParaRPr lang="en-CA"/>
-          </a:p>
-        </p:txBody>
-      </p:sp>
-      <p:sp>
-        <p:nvSpPr>
-          <p:cNvPr id="10" name="Text 6"/>
-          <p:cNvSpPr/>
-          <p:nvPr/>
-        </p:nvSpPr>
-        <p:spPr>
-          <a:xfrm>
-            <a:off x="3154680" y="3721608"/>
-            <a:ext cx="2651760" cy="411480"/>
-          </a:xfrm>
-          <a:prstGeom prst="rect">
-            <a:avLst/>
-          </a:prstGeom>
-          <a:noFill/>
-          <a:ln/>
-        </p:spPr>
-        <p:txBody>
-          <a:bodyPr wrap="square" rtlCol="0" anchor="ctr"/>
-          <a:lstStyle/>
-          <a:p>
-            <a:pPr marL="0" indent="0" algn="ctr">
-              <a:buNone/>
-            </a:pPr>
-            <a:r>
-              <a:rPr lang="en-US" sz="1800" b="1" dirty="0">
-                <a:solidFill>
-                  <a:srgbClr val="2563EB"/>
-                </a:solidFill>
-                <a:latin typeface="Cambria" pitchFamily="34" charset="0"/>
-                <a:ea typeface="Cambria" pitchFamily="34" charset="-122"/>
-                <a:cs typeface="Cambria" pitchFamily="34" charset="-120"/>
-              </a:rPr>
-              <a:t>RMSE</a:t>
-            </a:r>
-            <a:endParaRPr lang="en-US" sz="1800" dirty="0"/>
-          </a:p>
-        </p:txBody>
-      </p:sp>
-      <p:sp>
-        <p:nvSpPr>
-          <p:cNvPr id="11" name="Text 7"/>
-          <p:cNvSpPr/>
-          <p:nvPr/>
-        </p:nvSpPr>
-        <p:spPr>
-          <a:xfrm>
-            <a:off x="3154680" y="4178808"/>
-            <a:ext cx="2651760" cy="640080"/>
-          </a:xfrm>
-          <a:prstGeom prst="rect">
-            <a:avLst/>
-          </a:prstGeom>
-          <a:noFill/>
-          <a:ln/>
-        </p:spPr>
-        <p:txBody>
-          <a:bodyPr wrap="square" rtlCol="0" anchor="ctr"/>
-          <a:lstStyle/>
-          <a:p>
-            <a:pPr marL="0" indent="0" algn="ctr">
-              <a:buNone/>
-            </a:pPr>
-            <a:r>
-              <a:rPr lang="en-US" sz="1100" dirty="0">
-                <a:solidFill>
-                  <a:srgbClr val="6B7280"/>
-                </a:solidFill>
-                <a:latin typeface="Calibri" pitchFamily="34" charset="0"/>
-                <a:ea typeface="Calibri" pitchFamily="34" charset="-122"/>
-                <a:cs typeface="Calibri" pitchFamily="34" charset="-120"/>
-              </a:rPr>
-              <a:t>Root Mean Squared Error</a:t>
-            </a:r>
-            <a:endParaRPr lang="en-US" sz="1100" dirty="0"/>
-          </a:p>
-        </p:txBody>
-      </p:sp>
-      <p:sp>
-        <p:nvSpPr>
-          <p:cNvPr id="12" name="Shape 8"/>
-          <p:cNvSpPr/>
-          <p:nvPr/>
-        </p:nvSpPr>
-        <p:spPr>
-          <a:xfrm>
-            <a:off x="6035040" y="3657600"/>
-            <a:ext cx="2651760" cy="1234440"/>
-          </a:xfrm>
-          <a:prstGeom prst="roundRect">
-            <a:avLst>
-              <a:gd name="adj" fmla="val 6667"/>
-            </a:avLst>
-          </a:prstGeom>
-          <a:solidFill>
-            <a:srgbClr val="FFFFFF"/>
-          </a:solidFill>
-          <a:ln w="12700">
-            <a:solidFill>
-              <a:srgbClr val="E5E7EB"/>
-            </a:solidFill>
-            <a:prstDash val="solid"/>
-          </a:ln>
-          <a:effectLst>
-            <a:outerShdw blurRad="63500" dist="25400" dir="2700000" algn="bl" rotWithShape="0">
-              <a:srgbClr val="000000">
-                <a:alpha val="8000"/>
-              </a:srgbClr>
-            </a:outerShdw>
-          </a:effectLst>
-        </p:spPr>
-        <p:txBody>
-          <a:bodyPr/>
-          <a:lstStyle/>
-          <a:p>
-            <a:endParaRPr lang="en-CA"/>
-          </a:p>
-        </p:txBody>
-      </p:sp>
-      <p:sp>
-        <p:nvSpPr>
-          <p:cNvPr id="13" name="Text 9"/>
-          <p:cNvSpPr/>
-          <p:nvPr/>
-        </p:nvSpPr>
-        <p:spPr>
-          <a:xfrm>
-            <a:off x="6035040" y="3721608"/>
-            <a:ext cx="2651760" cy="411480"/>
-          </a:xfrm>
-          <a:prstGeom prst="rect">
-            <a:avLst/>
-          </a:prstGeom>
-          <a:noFill/>
-          <a:ln/>
-        </p:spPr>
-        <p:txBody>
-          <a:bodyPr wrap="square" rtlCol="0" anchor="ctr"/>
-          <a:lstStyle/>
-          <a:p>
-            <a:pPr marL="0" indent="0" algn="ctr">
-              <a:buNone/>
-            </a:pPr>
-            <a:r>
-              <a:rPr lang="en-US" sz="1800" b="1" dirty="0">
-                <a:solidFill>
-                  <a:srgbClr val="2563EB"/>
-                </a:solidFill>
-                <a:latin typeface="Cambria" pitchFamily="34" charset="0"/>
-                <a:ea typeface="Cambria" pitchFamily="34" charset="-122"/>
-                <a:cs typeface="Cambria" pitchFamily="34" charset="-120"/>
-              </a:rPr>
-              <a:t>MAPE</a:t>
-            </a:r>
-            <a:endParaRPr lang="en-US" sz="1800" dirty="0"/>
-          </a:p>
-        </p:txBody>
-      </p:sp>
-      <p:sp>
-        <p:nvSpPr>
-          <p:cNvPr id="14" name="Text 10"/>
-          <p:cNvSpPr/>
-          <p:nvPr/>
-        </p:nvSpPr>
-        <p:spPr>
-          <a:xfrm>
-            <a:off x="6035040" y="4178808"/>
-            <a:ext cx="2651760" cy="640080"/>
-          </a:xfrm>
-          <a:prstGeom prst="rect">
-            <a:avLst/>
-          </a:prstGeom>
-          <a:noFill/>
-          <a:ln/>
-        </p:spPr>
-        <p:txBody>
-          <a:bodyPr wrap="square" rtlCol="0" anchor="ctr"/>
-          <a:lstStyle/>
-          <a:p>
-            <a:pPr marL="0" indent="0" algn="ctr">
-              <a:buNone/>
-            </a:pPr>
-            <a:r>
-              <a:rPr lang="en-US" sz="1100" dirty="0">
-                <a:solidFill>
-                  <a:srgbClr val="6B7280"/>
-                </a:solidFill>
-                <a:latin typeface="Calibri" pitchFamily="34" charset="0"/>
-                <a:ea typeface="Calibri" pitchFamily="34" charset="-122"/>
-                <a:cs typeface="Calibri" pitchFamily="34" charset="-120"/>
-              </a:rPr>
-              <a:t>Mean Absolute Percentage Error</a:t>
-            </a:r>
-            <a:endParaRPr lang="en-US" sz="1100" dirty="0"/>
-          </a:p>
-        </p:txBody>
-      </p:sp>
-      <p:sp>
-        <p:nvSpPr>
-          <p:cNvPr id="15" name="Shape 11"/>
-          <p:cNvSpPr/>
-          <p:nvPr/>
-        </p:nvSpPr>
-        <p:spPr>
-          <a:xfrm>
-            <a:off x="8732520" y="3657600"/>
-            <a:ext cx="109728" cy="1234440"/>
-          </a:xfrm>
-          <a:prstGeom prst="roundRect">
-            <a:avLst>
-              <a:gd name="adj" fmla="val 50000"/>
-            </a:avLst>
-          </a:prstGeom>
-          <a:solidFill>
-            <a:srgbClr val="2563EB"/>
-          </a:solidFill>
-          <a:ln w="12700">
-            <a:solidFill>
-              <a:srgbClr val="2563EB"/>
-            </a:solidFill>
-            <a:prstDash val="solid"/>
-          </a:ln>
-        </p:spPr>
-        <p:txBody>
-          <a:bodyPr/>
-          <a:lstStyle/>
-          <a:p>
-            <a:endParaRPr lang="en-CA"/>
-          </a:p>
-        </p:txBody>
-      </p:sp>
-      <p:sp>
-        <p:nvSpPr>
-          <p:cNvPr id="16" name="Text 12"/>
-          <p:cNvSpPr/>
-          <p:nvPr/>
-        </p:nvSpPr>
-        <p:spPr>
-          <a:xfrm>
-            <a:off x="8887968" y="3749040"/>
-            <a:ext cx="0" cy="0"/>
-          </a:xfrm>
-          <a:prstGeom prst="rect">
-            <a:avLst/>
-          </a:prstGeom>
-          <a:noFill/>
-          <a:ln/>
-        </p:spPr>
-        <p:txBody>
-          <a:bodyPr wrap="square" rtlCol="0" anchor="ctr"/>
-          <a:lstStyle/>
-          <a:p>
             <a:pPr marL="0" indent="0">
               <a:buNone/>
             </a:pPr>
@@ -6375,13 +4494,15 @@
         </p:nvSpPr>
         <p:spPr>
           <a:xfrm>
-            <a:off x="274320" y="4800600"/>
-            <a:ext cx="8595360" cy="320040"/>
-          </a:xfrm>
-          <a:prstGeom prst="rect">
-            <a:avLst/>
-          </a:prstGeom>
-          <a:noFill/>
+            <a:off x="274320" y="4206240"/>
+            <a:ext cx="8503920" cy="534924"/>
+          </a:xfrm>
+          <a:prstGeom prst="rect">
+            <a:avLst/>
+          </a:prstGeom>
+          <a:solidFill>
+            <a:schemeClr val="bg1"/>
+          </a:solidFill>
           <a:ln/>
         </p:spPr>
         <p:txBody>
@@ -6414,7 +4535,7 @@
 </p:sld>
 </file>
 
-<file path=ppt/slides/slide8.xml><?xml version="1.0" encoding="utf-8"?>
+<file path=ppt/slides/slide7.xml><?xml version="1.0" encoding="utf-8"?>
 <p:sld xmlns:a="http://schemas.openxmlformats.org/drawingml/2006/main" xmlns:r="http://schemas.openxmlformats.org/officeDocument/2006/relationships" xmlns:p="http://schemas.openxmlformats.org/presentationml/2006/main">
   <p:cSld name="Slide 8">
     <p:bg>
@@ -7019,7 +5140,7 @@
 </p:sld>
 </file>
 
-<file path=ppt/slides/slide9.xml><?xml version="1.0" encoding="utf-8"?>
+<file path=ppt/slides/slide8.xml><?xml version="1.0" encoding="utf-8"?>
 <p:sld xmlns:a="http://schemas.openxmlformats.org/drawingml/2006/main" xmlns:r="http://schemas.openxmlformats.org/officeDocument/2006/relationships" xmlns:p="http://schemas.openxmlformats.org/presentationml/2006/main">
   <p:cSld name="Slide 9">
     <p:bg>
@@ -7254,7 +5375,7 @@
               <a:buNone/>
             </a:pPr>
             <a:r>
-              <a:rPr lang="en-US" sz="1400" b="1" dirty="0">
+              <a:rPr lang="en-US" b="1" dirty="0">
                 <a:solidFill>
                   <a:srgbClr val="1B2B5E"/>
                 </a:solidFill>
@@ -7264,7 +5385,7 @@
               </a:rPr>
               <a:t>Stable Wellbeing Trend</a:t>
             </a:r>
-            <a:endParaRPr lang="en-US" sz="1400" dirty="0"/>
+            <a:endParaRPr lang="en-US" dirty="0"/>
           </a:p>
         </p:txBody>
       </p:sp>
@@ -7293,7 +5414,7 @@
               <a:buNone/>
             </a:pPr>
             <a:r>
-              <a:rPr lang="en-US" sz="1250" dirty="0">
+              <a:rPr lang="en-US" sz="1600" dirty="0">
                 <a:solidFill>
                   <a:srgbClr val="374151"/>
                 </a:solidFill>
@@ -7303,7 +5424,7 @@
               </a:rPr>
               <a:t>Overall life satisfaction in New Zealand remained relatively stable between 2014 and 2018, showing only a modest decline from 7.80 to 7.70.</a:t>
             </a:r>
-            <a:endParaRPr lang="en-US" sz="1250" dirty="0"/>
+            <a:endParaRPr lang="en-US" sz="1600" dirty="0"/>
           </a:p>
         </p:txBody>
       </p:sp>
@@ -7446,7 +5567,7 @@
               <a:buNone/>
             </a:pPr>
             <a:r>
-              <a:rPr lang="en-US" sz="1400" b="1" dirty="0">
+              <a:rPr lang="en-US" b="1" dirty="0">
                 <a:solidFill>
                   <a:srgbClr val="1B2B5E"/>
                 </a:solidFill>
@@ -7456,7 +5577,7 @@
               </a:rPr>
               <a:t>Simpler Models Outperformed Complex Ones</a:t>
             </a:r>
-            <a:endParaRPr lang="en-US" sz="1400" dirty="0"/>
+            <a:endParaRPr lang="en-US" dirty="0"/>
           </a:p>
         </p:txBody>
       </p:sp>
@@ -7485,7 +5606,7 @@
               <a:buNone/>
             </a:pPr>
             <a:r>
-              <a:rPr lang="en-US" sz="1250" dirty="0">
+              <a:rPr lang="en-US" sz="1400" dirty="0">
                 <a:solidFill>
                   <a:srgbClr val="374151"/>
                 </a:solidFill>
@@ -7495,7 +5616,7 @@
               </a:rPr>
               <a:t>Linear Regression and ARIMA outperformed deep learning models such as ANN and LSTM. This outcome is expected when working with a small dataset that contains insufficient observations to train complex neural networks effectively.</a:t>
             </a:r>
-            <a:endParaRPr lang="en-US" sz="1250" dirty="0"/>
+            <a:endParaRPr lang="en-US" sz="1400" dirty="0"/>
           </a:p>
         </p:txBody>
       </p:sp>
@@ -7638,7 +5759,7 @@
               <a:buNone/>
             </a:pPr>
             <a:r>
-              <a:rPr lang="en-US" sz="1400" b="1" dirty="0">
+              <a:rPr lang="en-US" b="1" dirty="0">
                 <a:solidFill>
                   <a:srgbClr val="1B2B5E"/>
                 </a:solidFill>
@@ -7648,7 +5769,7 @@
               </a:rPr>
               <a:t>Successful Forecasting Demonstrated</a:t>
             </a:r>
-            <a:endParaRPr lang="en-US" sz="1400" dirty="0"/>
+            <a:endParaRPr lang="en-US" dirty="0"/>
           </a:p>
         </p:txBody>
       </p:sp>
@@ -7677,7 +5798,7 @@
               <a:buNone/>
             </a:pPr>
             <a:r>
-              <a:rPr lang="en-US" sz="1250" dirty="0">
+              <a:rPr lang="en-US" sz="1400" dirty="0">
                 <a:solidFill>
                   <a:srgbClr val="374151"/>
                 </a:solidFill>
@@ -7687,7 +5808,7 @@
               </a:rPr>
               <a:t>The forecasting process successfully predicted the next year's wellbeing value (7.74 for 2019), demonstrating how predictive analytics can support evidence-based future planning and decision-making.</a:t>
             </a:r>
-            <a:endParaRPr lang="en-US" sz="1250" dirty="0"/>
+            <a:endParaRPr lang="en-US" sz="1400" dirty="0"/>
           </a:p>
         </p:txBody>
       </p:sp>
